--- a/Design_specifications/report.pptx
+++ b/Design_specifications/report.pptx
@@ -255,7 +255,7 @@
           <a:p>
             <a:fld id="{C49AAB97-8501-4F6E-BB0C-E5CC115A7D4A}" type="datetimeFigureOut">
               <a:rPr lang="en-US" smtClean="0"/>
-              <a:t>5/5/2026</a:t>
+              <a:t>5/6/2026</a:t>
             </a:fld>
             <a:endParaRPr lang="en-US"/>
           </a:p>
@@ -680,7 +680,7 @@
           <a:p>
             <a:fld id="{7FFC951A-DB27-4B19-97D3-E946EEC636FF}" type="datetimeFigureOut">
               <a:rPr lang="en-US" smtClean="0"/>
-              <a:t>5/5/2026</a:t>
+              <a:t>5/6/2026</a:t>
             </a:fld>
             <a:endParaRPr lang="en-US"/>
           </a:p>
@@ -908,7 +908,7 @@
           <a:p>
             <a:fld id="{7FFC951A-DB27-4B19-97D3-E946EEC636FF}" type="datetimeFigureOut">
               <a:rPr lang="en-US" smtClean="0"/>
-              <a:t>5/5/2026</a:t>
+              <a:t>5/6/2026</a:t>
             </a:fld>
             <a:endParaRPr lang="en-US"/>
           </a:p>
@@ -1088,7 +1088,7 @@
           <a:p>
             <a:fld id="{7FFC951A-DB27-4B19-97D3-E946EEC636FF}" type="datetimeFigureOut">
               <a:rPr lang="en-US" smtClean="0"/>
-              <a:t>5/5/2026</a:t>
+              <a:t>5/6/2026</a:t>
             </a:fld>
             <a:endParaRPr lang="en-US"/>
           </a:p>
@@ -1258,7 +1258,7 @@
           <a:p>
             <a:fld id="{7FFC951A-DB27-4B19-97D3-E946EEC636FF}" type="datetimeFigureOut">
               <a:rPr lang="en-US" smtClean="0"/>
-              <a:t>5/5/2026</a:t>
+              <a:t>5/6/2026</a:t>
             </a:fld>
             <a:endParaRPr lang="en-US"/>
           </a:p>
@@ -1512,7 +1512,7 @@
           <a:p>
             <a:fld id="{7FFC951A-DB27-4B19-97D3-E946EEC636FF}" type="datetimeFigureOut">
               <a:rPr lang="en-US" smtClean="0"/>
-              <a:t>5/5/2026</a:t>
+              <a:t>5/6/2026</a:t>
             </a:fld>
             <a:endParaRPr lang="en-US"/>
           </a:p>
@@ -1838,7 +1838,7 @@
           <a:p>
             <a:fld id="{7FFC951A-DB27-4B19-97D3-E946EEC636FF}" type="datetimeFigureOut">
               <a:rPr lang="en-US" smtClean="0"/>
-              <a:t>5/5/2026</a:t>
+              <a:t>5/6/2026</a:t>
             </a:fld>
             <a:endParaRPr lang="en-US"/>
           </a:p>
@@ -2289,7 +2289,7 @@
           <a:p>
             <a:fld id="{7FFC951A-DB27-4B19-97D3-E946EEC636FF}" type="datetimeFigureOut">
               <a:rPr lang="en-US" smtClean="0"/>
-              <a:t>5/5/2026</a:t>
+              <a:t>5/6/2026</a:t>
             </a:fld>
             <a:endParaRPr lang="en-US"/>
           </a:p>
@@ -2407,7 +2407,7 @@
           <a:p>
             <a:fld id="{7FFC951A-DB27-4B19-97D3-E946EEC636FF}" type="datetimeFigureOut">
               <a:rPr lang="en-US" smtClean="0"/>
-              <a:t>5/5/2026</a:t>
+              <a:t>5/6/2026</a:t>
             </a:fld>
             <a:endParaRPr lang="en-US"/>
           </a:p>
@@ -2502,7 +2502,7 @@
           <a:p>
             <a:fld id="{7FFC951A-DB27-4B19-97D3-E946EEC636FF}" type="datetimeFigureOut">
               <a:rPr lang="en-US" smtClean="0"/>
-              <a:t>5/5/2026</a:t>
+              <a:t>5/6/2026</a:t>
             </a:fld>
             <a:endParaRPr lang="en-US"/>
           </a:p>
@@ -2789,7 +2789,7 @@
           <a:p>
             <a:fld id="{7FFC951A-DB27-4B19-97D3-E946EEC636FF}" type="datetimeFigureOut">
               <a:rPr lang="en-US" smtClean="0"/>
-              <a:t>5/5/2026</a:t>
+              <a:t>5/6/2026</a:t>
             </a:fld>
             <a:endParaRPr lang="en-US"/>
           </a:p>
@@ -3111,7 +3111,7 @@
           <a:p>
             <a:fld id="{7FFC951A-DB27-4B19-97D3-E946EEC636FF}" type="datetimeFigureOut">
               <a:rPr lang="en-US" smtClean="0"/>
-              <a:t>5/5/2026</a:t>
+              <a:t>5/6/2026</a:t>
             </a:fld>
             <a:endParaRPr lang="en-US"/>
           </a:p>
@@ -3365,7 +3365,7 @@
           <a:p>
             <a:fld id="{7FFC951A-DB27-4B19-97D3-E946EEC636FF}" type="datetimeFigureOut">
               <a:rPr lang="en-US" smtClean="0"/>
-              <a:t>5/5/2026</a:t>
+              <a:t>5/6/2026</a:t>
             </a:fld>
             <a:endParaRPr lang="en-US"/>
           </a:p>
@@ -6384,19 +6384,7 @@
             </a:r>
             <a:r>
               <a:rPr lang="en-US" b="1" dirty="0" smtClean="0"/>
-              <a:t>	 </a:t>
-            </a:r>
-            <a:r>
-              <a:rPr lang="en-US" b="1" dirty="0" smtClean="0"/>
-              <a:t>       (</a:t>
-            </a:r>
-            <a:r>
-              <a:rPr lang="en-US" b="1" dirty="0" smtClean="0"/>
-              <a:t>address = </a:t>
-            </a:r>
-            <a:r>
-              <a:rPr lang="en-US" b="1" dirty="0" smtClean="0"/>
-              <a:t>[</a:t>
+              <a:t>	        (address = [</a:t>
             </a:r>
             <a:r>
               <a:rPr lang="en-US" dirty="0">
@@ -6465,11 +6453,7 @@
             </a:r>
             <a:r>
               <a:rPr lang="en-US" b="1" dirty="0" smtClean="0"/>
-              <a:t>WRITE : address = </a:t>
-            </a:r>
-            <a:r>
-              <a:rPr lang="en-US" b="1" dirty="0" smtClean="0"/>
-              <a:t>[</a:t>
+              <a:t>WRITE : address = [</a:t>
             </a:r>
             <a:r>
               <a:rPr lang="en-US" dirty="0" smtClean="0">
@@ -6539,11 +6523,6 @@
               </a:rPr>
               <a:t> </a:t>
             </a:r>
-            <a:endParaRPr lang="en-US" dirty="0" smtClean="0">
-              <a:solidFill>
-                <a:srgbClr val="FF0000"/>
-              </a:solidFill>
-            </a:endParaRPr>
           </a:p>
           <a:p>
             <a:r>
@@ -6722,11 +6701,7 @@
           <a:p>
             <a:r>
               <a:rPr lang="en-US" b="1" dirty="0" smtClean="0"/>
-              <a:t>	WRITE </a:t>
-            </a:r>
-            <a:r>
-              <a:rPr lang="en-US" b="1" dirty="0" smtClean="0"/>
-              <a:t>: address = [</a:t>
+              <a:t>	WRITE : address = [</a:t>
             </a:r>
             <a:r>
               <a:rPr lang="en-US" dirty="0" smtClean="0">
@@ -7205,15 +7180,7 @@
                   <a:schemeClr val="tx1"/>
                 </a:solidFill>
               </a:rPr>
-              <a:t>The main controller module FSM that performs the operations and controls the data path</a:t>
-            </a:r>
-            <a:r>
-              <a:rPr lang="en-US" sz="1800" dirty="0" smtClean="0">
-                <a:solidFill>
-                  <a:schemeClr val="tx1"/>
-                </a:solidFill>
-              </a:rPr>
-              <a:t>. Designed using DDR4 timing specs.</a:t>
+              <a:t>The main controller module FSM that performs the operations and controls the data path. Designed using DDR4 timing specs.</a:t>
             </a:r>
           </a:p>
           <a:p>
@@ -7315,31 +7282,7 @@
                   <a:schemeClr val="tx1"/>
                 </a:solidFill>
               </a:rPr>
-              <a:t>Govern the </a:t>
-            </a:r>
-            <a:r>
-              <a:rPr lang="en-US" sz="1800" dirty="0" smtClean="0">
-                <a:solidFill>
-                  <a:schemeClr val="tx1"/>
-                </a:solidFill>
-              </a:rPr>
-              <a:t>issuing of </a:t>
-            </a:r>
-            <a:r>
-              <a:rPr lang="en-US" sz="1800" dirty="0" smtClean="0">
-                <a:solidFill>
-                  <a:schemeClr val="tx1"/>
-                </a:solidFill>
-              </a:rPr>
-              <a:t>precharge immediately after read/write commands – there has to be a time gap before precharge – useful for refresh and CASE 3 read/write</a:t>
-            </a:r>
-            <a:r>
-              <a:rPr lang="en-US" sz="1800" dirty="0" smtClean="0">
-                <a:solidFill>
-                  <a:schemeClr val="tx1"/>
-                </a:solidFill>
-              </a:rPr>
-              <a:t>.</a:t>
+              <a:t>Govern the issuing of precharge immediately after read/write commands – there has to be a time gap before precharge – useful for refresh and CASE 3 read/write.</a:t>
             </a:r>
           </a:p>
           <a:p>
@@ -7817,15 +7760,7 @@
                   <a:schemeClr val="tx1"/>
                 </a:solidFill>
               </a:rPr>
-              <a:t>Project GitHub </a:t>
-            </a:r>
-            <a:r>
-              <a:rPr lang="en-US" sz="1800" dirty="0" smtClean="0">
-                <a:solidFill>
-                  <a:schemeClr val="tx1"/>
-                </a:solidFill>
-              </a:rPr>
-              <a:t>repository</a:t>
+              <a:t>Project GitHub repository</a:t>
             </a:r>
           </a:p>
           <a:p>
@@ -9011,15 +8946,7 @@
                   <a:schemeClr val="tx1"/>
                 </a:solidFill>
               </a:rPr>
-              <a:t>MEMORY </a:t>
-            </a:r>
-            <a:r>
-              <a:rPr lang="en-US" sz="2400" dirty="0" smtClean="0">
-                <a:solidFill>
-                  <a:schemeClr val="tx1"/>
-                </a:solidFill>
-              </a:rPr>
-              <a:t>SPECIFICATION</a:t>
+              <a:t>MEMORY SPECIFICATION</a:t>
             </a:r>
           </a:p>
           <a:p>
@@ -9030,15 +8957,7 @@
                   <a:schemeClr val="tx1"/>
                 </a:solidFill>
               </a:rPr>
-              <a:t>The </a:t>
-            </a:r>
-            <a:r>
-              <a:rPr lang="en-US" sz="1800" dirty="0" smtClean="0">
-                <a:solidFill>
-                  <a:schemeClr val="tx1"/>
-                </a:solidFill>
-              </a:rPr>
-              <a:t>primary design and testing of the controller was done with the following memory specifications:</a:t>
+              <a:t>The primary design and testing of the controller was done with the following memory specifications:</a:t>
             </a:r>
           </a:p>
           <a:p>
@@ -9094,15 +9013,7 @@
                   <a:schemeClr val="tx1"/>
                 </a:solidFill>
               </a:rPr>
-              <a:t>Single chip configured as one rank in the </a:t>
-            </a:r>
-            <a:r>
-              <a:rPr lang="en-US" sz="1800" dirty="0" smtClean="0">
-                <a:solidFill>
-                  <a:schemeClr val="tx1"/>
-                </a:solidFill>
-              </a:rPr>
-              <a:t>RAM</a:t>
+              <a:t>Single chip configured as one rank in the RAM</a:t>
             </a:r>
           </a:p>
           <a:p>
@@ -9159,11 +9070,6 @@
               </a:rPr>
               <a:t>Open page policy</a:t>
             </a:r>
-            <a:endParaRPr lang="en-US" sz="1800" dirty="0" smtClean="0">
-              <a:solidFill>
-                <a:schemeClr val="tx1"/>
-              </a:solidFill>
-            </a:endParaRPr>
           </a:p>
           <a:p>
             <a:pPr marL="342900" indent="-342900" algn="l">
